--- a/morning-registration-activities/today-i-will/downloads/Today_I_Will.pptx
+++ b/morning-registration-activities/today-i-will/downloads/Today_I_Will.pptx
@@ -6896,7 +6896,7 @@
                 </a:solidFill>
                 <a:latin typeface="Karla"/>
               </a:rPr>
-              <a:t>Needs: nothing new. Five more prompts are in the resource pack.</a:t>
+              <a:t>Needs: nothing new.</a:t>
             </a:r>
           </a:p>
         </p:txBody>

--- a/morning-registration-activities/today-i-will/downloads/Today_I_Will.pptx
+++ b/morning-registration-activities/today-i-will/downloads/Today_I_Will.pptx
@@ -3147,7 +3147,7 @@
                 <a:solidFill>
                   <a:srgbClr val="3D78BA"/>
                 </a:solidFill>
-                <a:latin typeface="Karla"/>
+                <a:latin typeface="Calibri"/>
               </a:rPr>
               <a:t>MORNING REGISTRATION ACTIVITIES</a:t>
             </a:r>
@@ -3179,11 +3179,11 @@
           <a:p>
             <a:pPr algn="ctr"/>
             <a:r>
-              <a:rPr sz="4000" b="1">
+              <a:rPr sz="4000" b="0">
                 <a:solidFill>
                   <a:srgbClr val="2F6FB5"/>
                 </a:solidFill>
-                <a:latin typeface="Libre Caslon Display"/>
+                <a:latin typeface="Georgia"/>
               </a:rPr>
               <a:t>Today I Will</a:t>
             </a:r>
@@ -3265,7 +3265,7 @@
                 <a:solidFill>
                   <a:srgbClr val="FFFDF7"/>
                 </a:solidFill>
-                <a:latin typeface="Karla"/>
+                <a:latin typeface="Calibri"/>
               </a:rPr>
               <a:t>VOLUME ONE</a:t>
             </a:r>
@@ -3301,7 +3301,7 @@
                 <a:solidFill>
                   <a:srgbClr val="2A5C93"/>
                 </a:solidFill>
-                <a:latin typeface="Karla"/>
+                <a:latin typeface="Calibri"/>
               </a:rPr>
               <a:t>Say one small thing you will do today. Tomorrow, somebody asks.</a:t>
             </a:r>
@@ -3458,7 +3458,7 @@
                 <a:solidFill>
                   <a:srgbClr val="FFFDF7"/>
                 </a:solidFill>
-                <a:latin typeface="Karla"/>
+                <a:latin typeface="Calibri"/>
               </a:rPr>
               <a:t>1</a:t>
             </a:r>
@@ -3494,7 +3494,7 @@
                 <a:solidFill>
                   <a:srgbClr val="2F6FB5"/>
                 </a:solidFill>
-                <a:latin typeface="Karla"/>
+                <a:latin typeface="Calibri"/>
               </a:rPr>
               <a:t>A prompt goes up</a:t>
             </a:r>
@@ -3534,7 +3534,7 @@
                 <a:solidFill>
                   <a:srgbClr val="2A5C93"/>
                 </a:solidFill>
-                <a:latin typeface="Karla"/>
+                <a:latin typeface="Calibri"/>
               </a:rPr>
               <a:t>One prompt on the board, showing what kind of promise today is.</a:t>
             </a:r>
@@ -3691,7 +3691,7 @@
                 <a:solidFill>
                   <a:srgbClr val="FFFDF7"/>
                 </a:solidFill>
-                <a:latin typeface="Karla"/>
+                <a:latin typeface="Calibri"/>
               </a:rPr>
               <a:t>2</a:t>
             </a:r>
@@ -3727,7 +3727,7 @@
                 <a:solidFill>
                   <a:srgbClr val="2F6FB5"/>
                 </a:solidFill>
-                <a:latin typeface="Karla"/>
+                <a:latin typeface="Calibri"/>
               </a:rPr>
               <a:t>You say yours out loud</a:t>
             </a:r>
@@ -3767,7 +3767,7 @@
                 <a:solidFill>
                   <a:srgbClr val="2A5C93"/>
                 </a:solidFill>
-                <a:latin typeface="Karla"/>
+                <a:latin typeface="Calibri"/>
               </a:rPr>
               <a:t>A few words is plenty. It has to be small enough to do by home time.</a:t>
             </a:r>
@@ -3924,7 +3924,7 @@
                 <a:solidFill>
                   <a:srgbClr val="FFFDF7"/>
                 </a:solidFill>
-                <a:latin typeface="Karla"/>
+                <a:latin typeface="Calibri"/>
               </a:rPr>
               <a:t>3</a:t>
             </a:r>
@@ -3960,7 +3960,7 @@
                 <a:solidFill>
                   <a:srgbClr val="2F6FB5"/>
                 </a:solidFill>
-                <a:latin typeface="Karla"/>
+                <a:latin typeface="Calibri"/>
               </a:rPr>
               <a:t>Tomorrow you get asked</a:t>
             </a:r>
@@ -4000,7 +4000,7 @@
                 <a:solidFill>
                   <a:srgbClr val="2A5C93"/>
                 </a:solidFill>
-                <a:latin typeface="Karla"/>
+                <a:latin typeface="Calibri"/>
               </a:rPr>
               <a:t>Two or three people say how yesterday went. “I didn’t” is a fine answer.</a:t>
             </a:r>
@@ -4082,7 +4082,7 @@
                 <a:solidFill>
                   <a:srgbClr val="FFFDF7"/>
                 </a:solidFill>
-                <a:latin typeface="Libre Caslon Display"/>
+                <a:latin typeface="Georgia"/>
               </a:rPr>
               <a:t>“Today I will do something for somebody else.”</a:t>
             </a:r>
@@ -4118,7 +4118,7 @@
                 <a:solidFill>
                   <a:srgbClr val="C4D9EE"/>
                 </a:solidFill>
-                <a:latin typeface="Karla"/>
+                <a:latin typeface="Calibri"/>
               </a:rPr>
               <a:t>The first of five prompts in these slides</a:t>
             </a:r>
@@ -4154,7 +4154,7 @@
                 <a:solidFill>
                   <a:srgbClr val="7896BD"/>
                 </a:solidFill>
-                <a:latin typeface="Karla"/>
+                <a:latin typeface="Calibri"/>
               </a:rPr>
               <a:t>Needs: nothing to print. The five prompts are already here, one to a morning.</a:t>
             </a:r>
@@ -4214,7 +4214,7 @@
                 <a:solidFill>
                   <a:srgbClr val="7896BD"/>
                 </a:solidFill>
-                <a:latin typeface="Libre Caslon Display"/>
+                <a:latin typeface="Georgia"/>
               </a:rPr>
               <a:t>The Pastoral Guide</a:t>
             </a:r>
@@ -4292,7 +4292,7 @@
                 <a:solidFill>
                   <a:srgbClr val="3D78BA"/>
                 </a:solidFill>
-                <a:latin typeface="Karla"/>
+                <a:latin typeface="Calibri"/>
               </a:rPr>
               <a:t>TODAY I WILL  ·  VOLUME ONE  ·  PROMPT 1 OF 5</a:t>
             </a:r>
@@ -4381,7 +4381,7 @@
                 <a:solidFill>
                   <a:srgbClr val="3D78BA"/>
                 </a:solidFill>
-                <a:latin typeface="Karla"/>
+                <a:latin typeface="Calibri"/>
               </a:rPr>
               <a:t>Today I will…</a:t>
             </a:r>
@@ -4463,11 +4463,11 @@
               </a:lnSpc>
             </a:pPr>
             <a:r>
-              <a:rPr sz="3400" b="1">
+              <a:rPr sz="3400" b="0">
                 <a:solidFill>
                   <a:srgbClr val="2F6FB5"/>
                 </a:solidFill>
-                <a:latin typeface="Libre Caslon Display"/>
+                <a:latin typeface="Georgia"/>
               </a:rPr>
               <a:t>do something for somebody else.</a:t>
             </a:r>
@@ -4503,7 +4503,7 @@
                 <a:solidFill>
                   <a:srgbClr val="2A5C93"/>
                 </a:solidFill>
-                <a:latin typeface="Karla"/>
+                <a:latin typeface="Calibri"/>
               </a:rPr>
               <a:t>Small enough to be finished by home time. A few words is plenty.</a:t>
             </a:r>
@@ -4563,7 +4563,7 @@
                 <a:solidFill>
                   <a:srgbClr val="7896BD"/>
                 </a:solidFill>
-                <a:latin typeface="Libre Caslon Display"/>
+                <a:latin typeface="Georgia"/>
               </a:rPr>
               <a:t>The Pastoral Guide</a:t>
             </a:r>
@@ -4641,7 +4641,7 @@
                 <a:solidFill>
                   <a:srgbClr val="3D78BA"/>
                 </a:solidFill>
-                <a:latin typeface="Karla"/>
+                <a:latin typeface="Calibri"/>
               </a:rPr>
               <a:t>TODAY I WILL  ·  VOLUME ONE  ·  PROMPT 2 OF 5</a:t>
             </a:r>
@@ -4730,7 +4730,7 @@
                 <a:solidFill>
                   <a:srgbClr val="3D78BA"/>
                 </a:solidFill>
-                <a:latin typeface="Karla"/>
+                <a:latin typeface="Calibri"/>
               </a:rPr>
               <a:t>Today I will…</a:t>
             </a:r>
@@ -4812,11 +4812,11 @@
               </a:lnSpc>
             </a:pPr>
             <a:r>
-              <a:rPr sz="3400" b="1">
+              <a:rPr sz="3400" b="0">
                 <a:solidFill>
                   <a:srgbClr val="2F6FB5"/>
                 </a:solidFill>
-                <a:latin typeface="Libre Caslon Display"/>
+                <a:latin typeface="Georgia"/>
               </a:rPr>
               <a:t>get something done that I have been putting off.</a:t>
             </a:r>
@@ -4852,7 +4852,7 @@
                 <a:solidFill>
                   <a:srgbClr val="2A5C93"/>
                 </a:solidFill>
-                <a:latin typeface="Karla"/>
+                <a:latin typeface="Calibri"/>
               </a:rPr>
               <a:t>Small enough to be finished by home time. A few words is plenty.</a:t>
             </a:r>
@@ -4912,7 +4912,7 @@
                 <a:solidFill>
                   <a:srgbClr val="7896BD"/>
                 </a:solidFill>
-                <a:latin typeface="Libre Caslon Display"/>
+                <a:latin typeface="Georgia"/>
               </a:rPr>
               <a:t>The Pastoral Guide</a:t>
             </a:r>
@@ -4990,7 +4990,7 @@
                 <a:solidFill>
                   <a:srgbClr val="3D78BA"/>
                 </a:solidFill>
-                <a:latin typeface="Karla"/>
+                <a:latin typeface="Calibri"/>
               </a:rPr>
               <a:t>TODAY I WILL  ·  VOLUME ONE  ·  PROMPT 3 OF 5</a:t>
             </a:r>
@@ -5079,7 +5079,7 @@
                 <a:solidFill>
                   <a:srgbClr val="3D78BA"/>
                 </a:solidFill>
-                <a:latin typeface="Karla"/>
+                <a:latin typeface="Calibri"/>
               </a:rPr>
               <a:t>Today I will…</a:t>
             </a:r>
@@ -5161,11 +5161,11 @@
               </a:lnSpc>
             </a:pPr>
             <a:r>
-              <a:rPr sz="3400" b="1">
+              <a:rPr sz="3400" b="0">
                 <a:solidFill>
                   <a:srgbClr val="2F6FB5"/>
                 </a:solidFill>
-                <a:latin typeface="Libre Caslon Display"/>
+                <a:latin typeface="Georgia"/>
               </a:rPr>
               <a:t>speak to somebody I do not usually speak to.</a:t>
             </a:r>
@@ -5201,7 +5201,7 @@
                 <a:solidFill>
                   <a:srgbClr val="2A5C93"/>
                 </a:solidFill>
-                <a:latin typeface="Karla"/>
+                <a:latin typeface="Calibri"/>
               </a:rPr>
               <a:t>Small enough to be finished by home time. A few words is plenty.</a:t>
             </a:r>
@@ -5261,7 +5261,7 @@
                 <a:solidFill>
                   <a:srgbClr val="7896BD"/>
                 </a:solidFill>
-                <a:latin typeface="Libre Caslon Display"/>
+                <a:latin typeface="Georgia"/>
               </a:rPr>
               <a:t>The Pastoral Guide</a:t>
             </a:r>
@@ -5339,7 +5339,7 @@
                 <a:solidFill>
                   <a:srgbClr val="3D78BA"/>
                 </a:solidFill>
-                <a:latin typeface="Karla"/>
+                <a:latin typeface="Calibri"/>
               </a:rPr>
               <a:t>TODAY I WILL  ·  VOLUME ONE  ·  PROMPT 4 OF 5</a:t>
             </a:r>
@@ -5428,7 +5428,7 @@
                 <a:solidFill>
                   <a:srgbClr val="3D78BA"/>
                 </a:solidFill>
-                <a:latin typeface="Karla"/>
+                <a:latin typeface="Calibri"/>
               </a:rPr>
               <a:t>Today I will…</a:t>
             </a:r>
@@ -5510,11 +5510,11 @@
               </a:lnSpc>
             </a:pPr>
             <a:r>
-              <a:rPr sz="3400" b="1">
+              <a:rPr sz="3400" b="0">
                 <a:solidFill>
                   <a:srgbClr val="2F6FB5"/>
                 </a:solidFill>
-                <a:latin typeface="Libre Caslon Display"/>
+                <a:latin typeface="Georgia"/>
               </a:rPr>
               <a:t>do something I would normally not bother with.</a:t>
             </a:r>
@@ -5550,7 +5550,7 @@
                 <a:solidFill>
                   <a:srgbClr val="2A5C93"/>
                 </a:solidFill>
-                <a:latin typeface="Karla"/>
+                <a:latin typeface="Calibri"/>
               </a:rPr>
               <a:t>Small enough to be finished by home time. A few words is plenty.</a:t>
             </a:r>
@@ -5610,7 +5610,7 @@
                 <a:solidFill>
                   <a:srgbClr val="7896BD"/>
                 </a:solidFill>
-                <a:latin typeface="Libre Caslon Display"/>
+                <a:latin typeface="Georgia"/>
               </a:rPr>
               <a:t>The Pastoral Guide</a:t>
             </a:r>
@@ -5688,7 +5688,7 @@
                 <a:solidFill>
                   <a:srgbClr val="3D78BA"/>
                 </a:solidFill>
-                <a:latin typeface="Karla"/>
+                <a:latin typeface="Calibri"/>
               </a:rPr>
               <a:t>TODAY I WILL  ·  VOLUME ONE  ·  PROMPT 5 OF 5</a:t>
             </a:r>
@@ -5777,7 +5777,7 @@
                 <a:solidFill>
                   <a:srgbClr val="3D78BA"/>
                 </a:solidFill>
-                <a:latin typeface="Karla"/>
+                <a:latin typeface="Calibri"/>
               </a:rPr>
               <a:t>Today I will…</a:t>
             </a:r>
@@ -5859,11 +5859,11 @@
               </a:lnSpc>
             </a:pPr>
             <a:r>
-              <a:rPr sz="3400" b="1">
+              <a:rPr sz="3400" b="0">
                 <a:solidFill>
                   <a:srgbClr val="2F6FB5"/>
                 </a:solidFill>
-                <a:latin typeface="Libre Caslon Display"/>
+                <a:latin typeface="Georgia"/>
               </a:rPr>
               <a:t>do one thing that makes tomorrow easier.</a:t>
             </a:r>
@@ -5899,7 +5899,7 @@
                 <a:solidFill>
                   <a:srgbClr val="2A5C93"/>
                 </a:solidFill>
-                <a:latin typeface="Karla"/>
+                <a:latin typeface="Calibri"/>
               </a:rPr>
               <a:t>Small enough to be finished by home time. A few words is plenty.</a:t>
             </a:r>
@@ -5959,7 +5959,7 @@
                 <a:solidFill>
                   <a:srgbClr val="7896BD"/>
                 </a:solidFill>
-                <a:latin typeface="Libre Caslon Display"/>
+                <a:latin typeface="Georgia"/>
               </a:rPr>
               <a:t>The Pastoral Guide</a:t>
             </a:r>
@@ -6037,7 +6037,7 @@
                 <a:solidFill>
                   <a:srgbClr val="3D78BA"/>
                 </a:solidFill>
-                <a:latin typeface="Karla"/>
+                <a:latin typeface="Calibri"/>
               </a:rPr>
               <a:t>TODAY I WILL</a:t>
             </a:r>
@@ -6069,11 +6069,11 @@
           <a:p>
             <a:pPr algn="ctr"/>
             <a:r>
-              <a:rPr sz="4000" b="1">
+              <a:rPr sz="4000" b="0">
                 <a:solidFill>
                   <a:srgbClr val="2F6FB5"/>
                 </a:solidFill>
-                <a:latin typeface="Libre Caslon Display"/>
+                <a:latin typeface="Georgia"/>
               </a:rPr>
               <a:t>Your prompt next</a:t>
             </a:r>
@@ -6113,7 +6113,7 @@
                 <a:solidFill>
                   <a:srgbClr val="2A5C93"/>
                 </a:solidFill>
-                <a:latin typeface="Karla"/>
+                <a:latin typeface="Calibri"/>
               </a:rPr>
               <a:t>Five prompts in these slides, and five more in the resource pack.</a:t>
             </a:r>
@@ -6123,7 +6123,7 @@
                 <a:solidFill>
                   <a:srgbClr val="2A5C93"/>
                 </a:solidFill>
-                <a:latin typeface="Karla"/>
+                <a:latin typeface="Calibri"/>
               </a:rPr>
               <a:t>After those, they come from you.</a:t>
             </a:r>
@@ -6280,7 +6280,7 @@
                 <a:solidFill>
                   <a:srgbClr val="FFFDF7"/>
                 </a:solidFill>
-                <a:latin typeface="Karla"/>
+                <a:latin typeface="Calibri"/>
               </a:rPr>
               <a:t>1</a:t>
             </a:r>
@@ -6316,7 +6316,7 @@
                 <a:solidFill>
                   <a:srgbClr val="2F6FB5"/>
                 </a:solidFill>
-                <a:latin typeface="Karla"/>
+                <a:latin typeface="Calibri"/>
               </a:rPr>
               <a:t>Think of a prompt</a:t>
             </a:r>
@@ -6356,7 +6356,7 @@
                 <a:solidFill>
                   <a:srgbClr val="2A5C93"/>
                 </a:solidFill>
-                <a:latin typeface="Karla"/>
+                <a:latin typeface="Calibri"/>
               </a:rPr>
               <a:t>Something you would be willing to answer yourself.</a:t>
             </a:r>
@@ -6513,7 +6513,7 @@
                 <a:solidFill>
                   <a:srgbClr val="FFFDF7"/>
                 </a:solidFill>
-                <a:latin typeface="Karla"/>
+                <a:latin typeface="Calibri"/>
               </a:rPr>
               <a:t>2</a:t>
             </a:r>
@@ -6549,7 +6549,7 @@
                 <a:solidFill>
                   <a:srgbClr val="2F6FB5"/>
                 </a:solidFill>
-                <a:latin typeface="Karla"/>
+                <a:latin typeface="Calibri"/>
               </a:rPr>
               <a:t>Keep it small</a:t>
             </a:r>
@@ -6589,7 +6589,7 @@
                 <a:solidFill>
                   <a:srgbClr val="2A5C93"/>
                 </a:solidFill>
-                <a:latin typeface="Karla"/>
+                <a:latin typeface="Calibri"/>
               </a:rPr>
               <a:t>Something you can finish between registration and home time.</a:t>
             </a:r>
@@ -6746,7 +6746,7 @@
                 <a:solidFill>
                   <a:srgbClr val="FFFDF7"/>
                 </a:solidFill>
-                <a:latin typeface="Karla"/>
+                <a:latin typeface="Calibri"/>
               </a:rPr>
               <a:t>3</a:t>
             </a:r>
@@ -6782,7 +6782,7 @@
                 <a:solidFill>
                   <a:srgbClr val="2F6FB5"/>
                 </a:solidFill>
-                <a:latin typeface="Karla"/>
+                <a:latin typeface="Calibri"/>
               </a:rPr>
               <a:t>Bring it to your tutor</a:t>
             </a:r>
@@ -6822,7 +6822,7 @@
                 <a:solidFill>
                   <a:srgbClr val="2A5C93"/>
                 </a:solidFill>
-                <a:latin typeface="Karla"/>
+                <a:latin typeface="Calibri"/>
               </a:rPr>
               <a:t>One of them goes up on the board the next morning.</a:t>
             </a:r>
@@ -6858,7 +6858,7 @@
                 <a:solidFill>
                   <a:srgbClr val="2F6FB5"/>
                 </a:solidFill>
-                <a:latin typeface="Libre Caslon Display"/>
+                <a:latin typeface="Georgia"/>
               </a:rPr>
               <a:t>The best prompts are the ones you would find slightly difficult yourself.</a:t>
             </a:r>
@@ -6894,7 +6894,7 @@
                 <a:solidFill>
                   <a:srgbClr val="7896BD"/>
                 </a:solidFill>
-                <a:latin typeface="Karla"/>
+                <a:latin typeface="Calibri"/>
               </a:rPr>
               <a:t>Needs: nothing new.</a:t>
             </a:r>
@@ -6954,7 +6954,7 @@
                 <a:solidFill>
                   <a:srgbClr val="7896BD"/>
                 </a:solidFill>
-                <a:latin typeface="Libre Caslon Display"/>
+                <a:latin typeface="Georgia"/>
               </a:rPr>
               <a:t>The Pastoral Guide</a:t>
             </a:r>
